--- a/reports/2026-10-23.pptx
+++ b/reports/2026-10-23.pptx
@@ -3386,7 +3386,7 @@
                 </a:solidFill>
                 <a:latin typeface="Microsoft YaHei"/>
               </a:rPr>
-              <a:t>-1.64%</a:t>
+              <a:t>-0.96%</a:t>
             </a:r>
           </a:p>
         </p:txBody>
@@ -3533,7 +3533,7 @@
                 </a:solidFill>
                 <a:latin typeface="Microsoft YaHei"/>
               </a:rPr>
-              <a:t>-5.80%</a:t>
+              <a:t>-5.62%</a:t>
             </a:r>
           </a:p>
         </p:txBody>
@@ -4235,8 +4235,162 @@
         </p:nvSpPr>
         <p:spPr>
           <a:xfrm>
-            <a:off x="1604883" y="1792224"/>
-            <a:ext cx="818276" cy="146304"/>
+            <a:off x="2423160" y="1792224"/>
+            <a:ext cx="793164" cy="146304"/>
+          </a:xfrm>
+          <a:prstGeom prst="rect">
+            <a:avLst/>
+          </a:prstGeom>
+          <a:solidFill>
+            <a:srgbClr val="198974"/>
+          </a:solidFill>
+          <a:ln>
+            <a:noFill/>
+          </a:ln>
+        </p:spPr>
+        <p:style>
+          <a:lnRef idx="1">
+            <a:schemeClr val="accent1"/>
+          </a:lnRef>
+          <a:fillRef idx="3">
+            <a:schemeClr val="accent1"/>
+          </a:fillRef>
+          <a:effectRef idx="2">
+            <a:schemeClr val="accent1"/>
+          </a:effectRef>
+          <a:fontRef idx="minor">
+            <a:schemeClr val="lt1"/>
+          </a:fontRef>
+        </p:style>
+        <p:txBody>
+          <a:bodyPr rtlCol="0" anchor="ctr"/>
+          <a:lstStyle/>
+          <a:p>
+            <a:pPr algn="ctr"/>
+          </a:p>
+        </p:txBody>
+      </p:sp>
+      <p:sp>
+        <p:nvSpPr>
+          <p:cNvPr id="9" name="TextBox 8"/>
+          <p:cNvSpPr txBox="1"/>
+          <p:nvPr/>
+        </p:nvSpPr>
+        <p:spPr>
+          <a:xfrm>
+            <a:off x="3262044" y="1746504"/>
+            <a:ext cx="502920" cy="201168"/>
+          </a:xfrm>
+          <a:prstGeom prst="rect">
+            <a:avLst/>
+          </a:prstGeom>
+          <a:noFill/>
+        </p:spPr>
+        <p:txBody>
+          <a:bodyPr wrap="none" lIns="18288" rIns="18288" tIns="18288" bIns="18288">
+            <a:spAutoFit/>
+          </a:bodyPr>
+          <a:lstStyle/>
+          <a:p>
+            <a:r>
+              <a:rPr sz="800" b="0">
+                <a:solidFill>
+                  <a:srgbClr val="1A2026"/>
+                </a:solidFill>
+                <a:latin typeface="Microsoft YaHei"/>
+              </a:rPr>
+              <a:t>1.68%</a:t>
+            </a:r>
+          </a:p>
+        </p:txBody>
+      </p:sp>
+      <p:sp>
+        <p:nvSpPr>
+          <p:cNvPr id="10" name="TextBox 9"/>
+          <p:cNvSpPr txBox="1"/>
+          <p:nvPr/>
+        </p:nvSpPr>
+        <p:spPr>
+          <a:xfrm>
+            <a:off x="640080" y="2121408"/>
+            <a:ext cx="1078992" cy="201168"/>
+          </a:xfrm>
+          <a:prstGeom prst="rect">
+            <a:avLst/>
+          </a:prstGeom>
+          <a:noFill/>
+        </p:spPr>
+        <p:txBody>
+          <a:bodyPr wrap="none" lIns="18288" rIns="18288" tIns="18288" bIns="18288">
+            <a:spAutoFit/>
+          </a:bodyPr>
+          <a:lstStyle/>
+          <a:p>
+            <a:r>
+              <a:rPr sz="800" b="0">
+                <a:solidFill>
+                  <a:srgbClr val="65707D"/>
+                </a:solidFill>
+                <a:latin typeface="Microsoft YaHei"/>
+              </a:rPr>
+              <a:t>富国红利精选QD</a:t>
+            </a:r>
+          </a:p>
+        </p:txBody>
+      </p:sp>
+      <p:sp>
+        <p:nvSpPr>
+          <p:cNvPr id="11" name="Rectangle 10"/>
+          <p:cNvSpPr/>
+          <p:nvPr/>
+        </p:nvSpPr>
+        <p:spPr>
+          <a:xfrm>
+            <a:off x="2423160" y="2194560"/>
+            <a:ext cx="9144" cy="118872"/>
+          </a:xfrm>
+          <a:prstGeom prst="rect">
+            <a:avLst/>
+          </a:prstGeom>
+          <a:solidFill>
+            <a:srgbClr val="DAD5C9"/>
+          </a:solidFill>
+          <a:ln>
+            <a:noFill/>
+          </a:ln>
+        </p:spPr>
+        <p:style>
+          <a:lnRef idx="1">
+            <a:schemeClr val="accent1"/>
+          </a:lnRef>
+          <a:fillRef idx="3">
+            <a:schemeClr val="accent1"/>
+          </a:fillRef>
+          <a:effectRef idx="2">
+            <a:schemeClr val="accent1"/>
+          </a:effectRef>
+          <a:fontRef idx="minor">
+            <a:schemeClr val="lt1"/>
+          </a:fontRef>
+        </p:style>
+        <p:txBody>
+          <a:bodyPr rtlCol="0" anchor="ctr"/>
+          <a:lstStyle/>
+          <a:p>
+            <a:pPr algn="ctr"/>
+          </a:p>
+        </p:txBody>
+      </p:sp>
+      <p:sp>
+        <p:nvSpPr>
+          <p:cNvPr id="12" name="Rectangle 11"/>
+          <p:cNvSpPr/>
+          <p:nvPr/>
+        </p:nvSpPr>
+        <p:spPr>
+          <a:xfrm>
+            <a:off x="1606680" y="2176272"/>
+            <a:ext cx="816479" cy="146304"/>
           </a:xfrm>
           <a:prstGeom prst="rect">
             <a:avLst/>
@@ -4272,13 +4426,13 @@
       </p:sp>
       <p:sp>
         <p:nvSpPr>
-          <p:cNvPr id="9" name="TextBox 8"/>
-          <p:cNvSpPr txBox="1"/>
-          <p:nvPr/>
-        </p:nvSpPr>
-        <p:spPr>
-          <a:xfrm>
-            <a:off x="2468879" y="1746504"/>
+          <p:cNvPr id="13" name="TextBox 12"/>
+          <p:cNvSpPr txBox="1"/>
+          <p:nvPr/>
+        </p:nvSpPr>
+        <p:spPr>
+          <a:xfrm>
+            <a:off x="2468879" y="2130552"/>
             <a:ext cx="502920" cy="201168"/>
           </a:xfrm>
           <a:prstGeom prst="rect">
@@ -4299,20 +4453,20 @@
                 </a:solidFill>
                 <a:latin typeface="Microsoft YaHei"/>
               </a:rPr>
-              <a:t>-1.73%</a:t>
-            </a:r>
-          </a:p>
-        </p:txBody>
-      </p:sp>
-      <p:sp>
-        <p:nvSpPr>
-          <p:cNvPr id="10" name="TextBox 9"/>
-          <p:cNvSpPr txBox="1"/>
-          <p:nvPr/>
-        </p:nvSpPr>
-        <p:spPr>
-          <a:xfrm>
-            <a:off x="640080" y="2121408"/>
+              <a:t>-1.72%</a:t>
+            </a:r>
+          </a:p>
+        </p:txBody>
+      </p:sp>
+      <p:sp>
+        <p:nvSpPr>
+          <p:cNvPr id="14" name="TextBox 13"/>
+          <p:cNvSpPr txBox="1"/>
+          <p:nvPr/>
+        </p:nvSpPr>
+        <p:spPr>
+          <a:xfrm>
+            <a:off x="640080" y="2505456"/>
             <a:ext cx="1078992" cy="201168"/>
           </a:xfrm>
           <a:prstGeom prst="rect">
@@ -4333,20 +4487,20 @@
                 </a:solidFill>
                 <a:latin typeface="Microsoft YaHei"/>
               </a:rPr>
-              <a:t>富国红利精选QD</a:t>
-            </a:r>
-          </a:p>
-        </p:txBody>
-      </p:sp>
-      <p:sp>
-        <p:nvSpPr>
-          <p:cNvPr id="11" name="Rectangle 10"/>
+              <a:t>纳斯达克100指</a:t>
+            </a:r>
+          </a:p>
+        </p:txBody>
+      </p:sp>
+      <p:sp>
+        <p:nvSpPr>
+          <p:cNvPr id="15" name="Rectangle 14"/>
           <p:cNvSpPr/>
           <p:nvPr/>
         </p:nvSpPr>
         <p:spPr>
           <a:xfrm>
-            <a:off x="2423160" y="2194560"/>
+            <a:off x="2423160" y="2578608"/>
             <a:ext cx="9144" cy="118872"/>
           </a:xfrm>
           <a:prstGeom prst="rect">
@@ -4383,14 +4537,14 @@
       </p:sp>
       <p:sp>
         <p:nvSpPr>
-          <p:cNvPr id="12" name="Rectangle 11"/>
+          <p:cNvPr id="16" name="Rectangle 15"/>
           <p:cNvSpPr/>
           <p:nvPr/>
         </p:nvSpPr>
         <p:spPr>
           <a:xfrm>
-            <a:off x="1606680" y="2176272"/>
-            <a:ext cx="816479" cy="146304"/>
+            <a:off x="1097280" y="2560320"/>
+            <a:ext cx="1325880" cy="146304"/>
           </a:xfrm>
           <a:prstGeom prst="rect">
             <a:avLst/>
@@ -4426,13 +4580,13 @@
       </p:sp>
       <p:sp>
         <p:nvSpPr>
-          <p:cNvPr id="13" name="TextBox 12"/>
-          <p:cNvSpPr txBox="1"/>
-          <p:nvPr/>
-        </p:nvSpPr>
-        <p:spPr>
-          <a:xfrm>
-            <a:off x="2468879" y="2130552"/>
+          <p:cNvPr id="17" name="TextBox 16"/>
+          <p:cNvSpPr txBox="1"/>
+          <p:nvPr/>
+        </p:nvSpPr>
+        <p:spPr>
+          <a:xfrm>
+            <a:off x="2468879" y="2514600"/>
             <a:ext cx="502920" cy="201168"/>
           </a:xfrm>
           <a:prstGeom prst="rect">
@@ -4453,20 +4607,20 @@
                 </a:solidFill>
                 <a:latin typeface="Microsoft YaHei"/>
               </a:rPr>
-              <a:t>-1.72%</a:t>
-            </a:r>
-          </a:p>
-        </p:txBody>
-      </p:sp>
-      <p:sp>
-        <p:nvSpPr>
-          <p:cNvPr id="14" name="TextBox 13"/>
-          <p:cNvSpPr txBox="1"/>
-          <p:nvPr/>
-        </p:nvSpPr>
-        <p:spPr>
-          <a:xfrm>
-            <a:off x="640080" y="2505456"/>
+              <a:t>-2.80%</a:t>
+            </a:r>
+          </a:p>
+        </p:txBody>
+      </p:sp>
+      <p:sp>
+        <p:nvSpPr>
+          <p:cNvPr id="18" name="TextBox 17"/>
+          <p:cNvSpPr txBox="1"/>
+          <p:nvPr/>
+        </p:nvSpPr>
+        <p:spPr>
+          <a:xfrm>
+            <a:off x="640080" y="2889503"/>
             <a:ext cx="1078992" cy="201168"/>
           </a:xfrm>
           <a:prstGeom prst="rect">
@@ -4487,20 +4641,20 @@
                 </a:solidFill>
                 <a:latin typeface="Microsoft YaHei"/>
               </a:rPr>
-              <a:t>纳斯达克100指</a:t>
-            </a:r>
-          </a:p>
-        </p:txBody>
-      </p:sp>
-      <p:sp>
-        <p:nvSpPr>
-          <p:cNvPr id="15" name="Rectangle 14"/>
+              <a:t>兴全安泰积极养老</a:t>
+            </a:r>
+          </a:p>
+        </p:txBody>
+      </p:sp>
+      <p:sp>
+        <p:nvSpPr>
+          <p:cNvPr id="19" name="Rectangle 18"/>
           <p:cNvSpPr/>
           <p:nvPr/>
         </p:nvSpPr>
         <p:spPr>
           <a:xfrm>
-            <a:off x="2423160" y="2578608"/>
+            <a:off x="2423160" y="2962656"/>
             <a:ext cx="9144" cy="118872"/>
           </a:xfrm>
           <a:prstGeom prst="rect">
@@ -4537,14 +4691,14 @@
       </p:sp>
       <p:sp>
         <p:nvSpPr>
-          <p:cNvPr id="16" name="Rectangle 15"/>
+          <p:cNvPr id="20" name="Rectangle 19"/>
           <p:cNvSpPr/>
           <p:nvPr/>
         </p:nvSpPr>
         <p:spPr>
           <a:xfrm>
-            <a:off x="1097280" y="2560320"/>
-            <a:ext cx="1325880" cy="146304"/>
+            <a:off x="2170838" y="2944368"/>
+            <a:ext cx="252321" cy="146304"/>
           </a:xfrm>
           <a:prstGeom prst="rect">
             <a:avLst/>
@@ -4580,13 +4734,13 @@
       </p:sp>
       <p:sp>
         <p:nvSpPr>
-          <p:cNvPr id="17" name="TextBox 16"/>
-          <p:cNvSpPr txBox="1"/>
-          <p:nvPr/>
-        </p:nvSpPr>
-        <p:spPr>
-          <a:xfrm>
-            <a:off x="2468879" y="2514600"/>
+          <p:cNvPr id="21" name="TextBox 20"/>
+          <p:cNvSpPr txBox="1"/>
+          <p:nvPr/>
+        </p:nvSpPr>
+        <p:spPr>
+          <a:xfrm>
+            <a:off x="2468879" y="2898648"/>
             <a:ext cx="502920" cy="201168"/>
           </a:xfrm>
           <a:prstGeom prst="rect">
@@ -4607,20 +4761,20 @@
                 </a:solidFill>
                 <a:latin typeface="Microsoft YaHei"/>
               </a:rPr>
-              <a:t>-2.80%</a:t>
-            </a:r>
-          </a:p>
-        </p:txBody>
-      </p:sp>
-      <p:sp>
-        <p:nvSpPr>
-          <p:cNvPr id="18" name="TextBox 17"/>
-          <p:cNvSpPr txBox="1"/>
-          <p:nvPr/>
-        </p:nvSpPr>
-        <p:spPr>
-          <a:xfrm>
-            <a:off x="640080" y="2889503"/>
+              <a:t>-0.53%</a:t>
+            </a:r>
+          </a:p>
+        </p:txBody>
+      </p:sp>
+      <p:sp>
+        <p:nvSpPr>
+          <p:cNvPr id="22" name="TextBox 21"/>
+          <p:cNvSpPr txBox="1"/>
+          <p:nvPr/>
+        </p:nvSpPr>
+        <p:spPr>
+          <a:xfrm>
+            <a:off x="640080" y="3273551"/>
             <a:ext cx="1078992" cy="201168"/>
           </a:xfrm>
           <a:prstGeom prst="rect">
@@ -4641,20 +4795,20 @@
                 </a:solidFill>
                 <a:latin typeface="Microsoft YaHei"/>
               </a:rPr>
-              <a:t>兴全安泰积极养老</a:t>
-            </a:r>
-          </a:p>
-        </p:txBody>
-      </p:sp>
-      <p:sp>
-        <p:nvSpPr>
-          <p:cNvPr id="19" name="Rectangle 18"/>
+              <a:t>易方达全球优质企</a:t>
+            </a:r>
+          </a:p>
+        </p:txBody>
+      </p:sp>
+      <p:sp>
+        <p:nvSpPr>
+          <p:cNvPr id="23" name="Rectangle 22"/>
           <p:cNvSpPr/>
           <p:nvPr/>
         </p:nvSpPr>
         <p:spPr>
           <a:xfrm>
-            <a:off x="2423160" y="2962656"/>
+            <a:off x="2423160" y="3346703"/>
             <a:ext cx="9144" cy="118872"/>
           </a:xfrm>
           <a:prstGeom prst="rect">
@@ -4691,14 +4845,14 @@
       </p:sp>
       <p:sp>
         <p:nvSpPr>
-          <p:cNvPr id="20" name="Rectangle 19"/>
+          <p:cNvPr id="24" name="Rectangle 23"/>
           <p:cNvSpPr/>
           <p:nvPr/>
         </p:nvSpPr>
         <p:spPr>
           <a:xfrm>
-            <a:off x="2170838" y="2944368"/>
-            <a:ext cx="252321" cy="146304"/>
+            <a:off x="1750302" y="3328415"/>
+            <a:ext cx="672857" cy="146304"/>
           </a:xfrm>
           <a:prstGeom prst="rect">
             <a:avLst/>
@@ -4734,13 +4888,13 @@
       </p:sp>
       <p:sp>
         <p:nvSpPr>
-          <p:cNvPr id="21" name="TextBox 20"/>
-          <p:cNvSpPr txBox="1"/>
-          <p:nvPr/>
-        </p:nvSpPr>
-        <p:spPr>
-          <a:xfrm>
-            <a:off x="2468879" y="2898648"/>
+          <p:cNvPr id="25" name="TextBox 24"/>
+          <p:cNvSpPr txBox="1"/>
+          <p:nvPr/>
+        </p:nvSpPr>
+        <p:spPr>
+          <a:xfrm>
+            <a:off x="2468879" y="3282696"/>
             <a:ext cx="502920" cy="201168"/>
           </a:xfrm>
           <a:prstGeom prst="rect">
@@ -4761,20 +4915,54 @@
                 </a:solidFill>
                 <a:latin typeface="Microsoft YaHei"/>
               </a:rPr>
-              <a:t>-0.53%</a:t>
-            </a:r>
-          </a:p>
-        </p:txBody>
-      </p:sp>
-      <p:sp>
-        <p:nvSpPr>
-          <p:cNvPr id="22" name="TextBox 21"/>
-          <p:cNvSpPr txBox="1"/>
-          <p:nvPr/>
-        </p:nvSpPr>
-        <p:spPr>
-          <a:xfrm>
-            <a:off x="640080" y="3273551"/>
+              <a:t>-1.42%</a:t>
+            </a:r>
+          </a:p>
+        </p:txBody>
+      </p:sp>
+      <p:sp>
+        <p:nvSpPr>
+          <p:cNvPr id="26" name="TextBox 25"/>
+          <p:cNvSpPr txBox="1"/>
+          <p:nvPr/>
+        </p:nvSpPr>
+        <p:spPr>
+          <a:xfrm>
+            <a:off x="4251960" y="1371600"/>
+            <a:ext cx="3383280" cy="219456"/>
+          </a:xfrm>
+          <a:prstGeom prst="rect">
+            <a:avLst/>
+          </a:prstGeom>
+          <a:noFill/>
+        </p:spPr>
+        <p:txBody>
+          <a:bodyPr wrap="none" lIns="18288" rIns="18288" tIns="18288" bIns="18288">
+            <a:spAutoFit/>
+          </a:bodyPr>
+          <a:lstStyle/>
+          <a:p>
+            <a:r>
+              <a:rPr sz="1100" b="1">
+                <a:solidFill>
+                  <a:srgbClr val="1A2026"/>
+                </a:solidFill>
+                <a:latin typeface="Microsoft YaHei"/>
+              </a:rPr>
+              <a:t>近1周收益</a:t>
+            </a:r>
+          </a:p>
+        </p:txBody>
+      </p:sp>
+      <p:sp>
+        <p:nvSpPr>
+          <p:cNvPr id="27" name="TextBox 26"/>
+          <p:cNvSpPr txBox="1"/>
+          <p:nvPr/>
+        </p:nvSpPr>
+        <p:spPr>
+          <a:xfrm>
+            <a:off x="4251960" y="1737360"/>
             <a:ext cx="1078992" cy="201168"/>
           </a:xfrm>
           <a:prstGeom prst="rect">
@@ -4795,20 +4983,20 @@
                 </a:solidFill>
                 <a:latin typeface="Microsoft YaHei"/>
               </a:rPr>
-              <a:t>易方达全球优质企</a:t>
-            </a:r>
-          </a:p>
-        </p:txBody>
-      </p:sp>
-      <p:sp>
-        <p:nvSpPr>
-          <p:cNvPr id="23" name="Rectangle 22"/>
+              <a:t>华夏沪深300E</a:t>
+            </a:r>
+          </a:p>
+        </p:txBody>
+      </p:sp>
+      <p:sp>
+        <p:nvSpPr>
+          <p:cNvPr id="28" name="Rectangle 27"/>
           <p:cNvSpPr/>
           <p:nvPr/>
         </p:nvSpPr>
         <p:spPr>
           <a:xfrm>
-            <a:off x="2423160" y="3346703"/>
+            <a:off x="6035040" y="1810512"/>
             <a:ext cx="9144" cy="118872"/>
           </a:xfrm>
           <a:prstGeom prst="rect">
@@ -4845,14 +5033,14 @@
       </p:sp>
       <p:sp>
         <p:nvSpPr>
-          <p:cNvPr id="24" name="Rectangle 23"/>
+          <p:cNvPr id="29" name="Rectangle 28"/>
           <p:cNvSpPr/>
           <p:nvPr/>
         </p:nvSpPr>
         <p:spPr>
           <a:xfrm>
-            <a:off x="1750302" y="3328415"/>
-            <a:ext cx="672857" cy="146304"/>
+            <a:off x="5496283" y="1792224"/>
+            <a:ext cx="538756" cy="146304"/>
           </a:xfrm>
           <a:prstGeom prst="rect">
             <a:avLst/>
@@ -4888,13 +5076,13 @@
       </p:sp>
       <p:sp>
         <p:nvSpPr>
-          <p:cNvPr id="25" name="TextBox 24"/>
-          <p:cNvSpPr txBox="1"/>
-          <p:nvPr/>
-        </p:nvSpPr>
-        <p:spPr>
-          <a:xfrm>
-            <a:off x="2468879" y="3282696"/>
+          <p:cNvPr id="30" name="TextBox 29"/>
+          <p:cNvSpPr txBox="1"/>
+          <p:nvPr/>
+        </p:nvSpPr>
+        <p:spPr>
+          <a:xfrm>
+            <a:off x="6080760" y="1746504"/>
             <a:ext cx="502920" cy="201168"/>
           </a:xfrm>
           <a:prstGeom prst="rect">
@@ -4915,54 +5103,20 @@
                 </a:solidFill>
                 <a:latin typeface="Microsoft YaHei"/>
               </a:rPr>
-              <a:t>-1.42%</a:t>
-            </a:r>
-          </a:p>
-        </p:txBody>
-      </p:sp>
-      <p:sp>
-        <p:nvSpPr>
-          <p:cNvPr id="26" name="TextBox 25"/>
-          <p:cNvSpPr txBox="1"/>
-          <p:nvPr/>
-        </p:nvSpPr>
-        <p:spPr>
-          <a:xfrm>
-            <a:off x="4251960" y="1371600"/>
-            <a:ext cx="3383280" cy="219456"/>
-          </a:xfrm>
-          <a:prstGeom prst="rect">
-            <a:avLst/>
-          </a:prstGeom>
-          <a:noFill/>
-        </p:spPr>
-        <p:txBody>
-          <a:bodyPr wrap="none" lIns="18288" rIns="18288" tIns="18288" bIns="18288">
-            <a:spAutoFit/>
-          </a:bodyPr>
-          <a:lstStyle/>
-          <a:p>
-            <a:r>
-              <a:rPr sz="1100" b="1">
-                <a:solidFill>
-                  <a:srgbClr val="1A2026"/>
-                </a:solidFill>
-                <a:latin typeface="Microsoft YaHei"/>
-              </a:rPr>
-              <a:t>近1周收益</a:t>
-            </a:r>
-          </a:p>
-        </p:txBody>
-      </p:sp>
-      <p:sp>
-        <p:nvSpPr>
-          <p:cNvPr id="27" name="TextBox 26"/>
-          <p:cNvSpPr txBox="1"/>
-          <p:nvPr/>
-        </p:nvSpPr>
-        <p:spPr>
-          <a:xfrm>
-            <a:off x="4251960" y="1737360"/>
+              <a:t>-1.36%</a:t>
+            </a:r>
+          </a:p>
+        </p:txBody>
+      </p:sp>
+      <p:sp>
+        <p:nvSpPr>
+          <p:cNvPr id="31" name="TextBox 30"/>
+          <p:cNvSpPr txBox="1"/>
+          <p:nvPr/>
+        </p:nvSpPr>
+        <p:spPr>
+          <a:xfrm>
+            <a:off x="4251960" y="2121408"/>
             <a:ext cx="1078992" cy="201168"/>
           </a:xfrm>
           <a:prstGeom prst="rect">
@@ -4983,20 +5137,20 @@
                 </a:solidFill>
                 <a:latin typeface="Microsoft YaHei"/>
               </a:rPr>
-              <a:t>华夏沪深300E</a:t>
-            </a:r>
-          </a:p>
-        </p:txBody>
-      </p:sp>
-      <p:sp>
-        <p:nvSpPr>
-          <p:cNvPr id="28" name="Rectangle 27"/>
+              <a:t>富国红利精选QD</a:t>
+            </a:r>
+          </a:p>
+        </p:txBody>
+      </p:sp>
+      <p:sp>
+        <p:nvSpPr>
+          <p:cNvPr id="32" name="Rectangle 31"/>
           <p:cNvSpPr/>
           <p:nvPr/>
         </p:nvSpPr>
         <p:spPr>
           <a:xfrm>
-            <a:off x="6035040" y="1810512"/>
+            <a:off x="6035040" y="2194560"/>
             <a:ext cx="9144" cy="118872"/>
           </a:xfrm>
           <a:prstGeom prst="rect">
@@ -5033,14 +5187,14 @@
       </p:sp>
       <p:sp>
         <p:nvSpPr>
-          <p:cNvPr id="29" name="Rectangle 28"/>
+          <p:cNvPr id="33" name="Rectangle 32"/>
           <p:cNvSpPr/>
           <p:nvPr/>
         </p:nvSpPr>
         <p:spPr>
           <a:xfrm>
-            <a:off x="4904078" y="1792224"/>
-            <a:ext cx="1130961" cy="146304"/>
+            <a:off x="4916585" y="2176272"/>
+            <a:ext cx="1118454" cy="146304"/>
           </a:xfrm>
           <a:prstGeom prst="rect">
             <a:avLst/>
@@ -5076,13 +5230,13 @@
       </p:sp>
       <p:sp>
         <p:nvSpPr>
-          <p:cNvPr id="30" name="TextBox 29"/>
-          <p:cNvSpPr txBox="1"/>
-          <p:nvPr/>
-        </p:nvSpPr>
-        <p:spPr>
-          <a:xfrm>
-            <a:off x="6080760" y="1746504"/>
+          <p:cNvPr id="34" name="TextBox 33"/>
+          <p:cNvSpPr txBox="1"/>
+          <p:nvPr/>
+        </p:nvSpPr>
+        <p:spPr>
+          <a:xfrm>
+            <a:off x="6080760" y="2130552"/>
             <a:ext cx="502920" cy="201168"/>
           </a:xfrm>
           <a:prstGeom prst="rect">
@@ -5103,20 +5257,20 @@
                 </a:solidFill>
                 <a:latin typeface="Microsoft YaHei"/>
               </a:rPr>
-              <a:t>-2.85%</a:t>
-            </a:r>
-          </a:p>
-        </p:txBody>
-      </p:sp>
-      <p:sp>
-        <p:nvSpPr>
-          <p:cNvPr id="31" name="TextBox 30"/>
-          <p:cNvSpPr txBox="1"/>
-          <p:nvPr/>
-        </p:nvSpPr>
-        <p:spPr>
-          <a:xfrm>
-            <a:off x="4251960" y="2121408"/>
+              <a:t>-2.82%</a:t>
+            </a:r>
+          </a:p>
+        </p:txBody>
+      </p:sp>
+      <p:sp>
+        <p:nvSpPr>
+          <p:cNvPr id="35" name="TextBox 34"/>
+          <p:cNvSpPr txBox="1"/>
+          <p:nvPr/>
+        </p:nvSpPr>
+        <p:spPr>
+          <a:xfrm>
+            <a:off x="4251960" y="2505456"/>
             <a:ext cx="1078992" cy="201168"/>
           </a:xfrm>
           <a:prstGeom prst="rect">
@@ -5137,20 +5291,20 @@
                 </a:solidFill>
                 <a:latin typeface="Microsoft YaHei"/>
               </a:rPr>
-              <a:t>富国红利精选QD</a:t>
-            </a:r>
-          </a:p>
-        </p:txBody>
-      </p:sp>
-      <p:sp>
-        <p:nvSpPr>
-          <p:cNvPr id="32" name="Rectangle 31"/>
+              <a:t>纳斯达克100指</a:t>
+            </a:r>
+          </a:p>
+        </p:txBody>
+      </p:sp>
+      <p:sp>
+        <p:nvSpPr>
+          <p:cNvPr id="36" name="Rectangle 35"/>
           <p:cNvSpPr/>
           <p:nvPr/>
         </p:nvSpPr>
         <p:spPr>
           <a:xfrm>
-            <a:off x="6035040" y="2194560"/>
+            <a:off x="6035040" y="2578608"/>
             <a:ext cx="9144" cy="118872"/>
           </a:xfrm>
           <a:prstGeom prst="rect">
@@ -5187,14 +5341,14 @@
       </p:sp>
       <p:sp>
         <p:nvSpPr>
-          <p:cNvPr id="33" name="Rectangle 32"/>
+          <p:cNvPr id="37" name="Rectangle 36"/>
           <p:cNvSpPr/>
           <p:nvPr/>
         </p:nvSpPr>
         <p:spPr>
           <a:xfrm>
-            <a:off x="4916585" y="2176272"/>
-            <a:ext cx="1118454" cy="146304"/>
+            <a:off x="4709160" y="2560320"/>
+            <a:ext cx="1325880" cy="146304"/>
           </a:xfrm>
           <a:prstGeom prst="rect">
             <a:avLst/>
@@ -5230,13 +5384,13 @@
       </p:sp>
       <p:sp>
         <p:nvSpPr>
-          <p:cNvPr id="34" name="TextBox 33"/>
-          <p:cNvSpPr txBox="1"/>
-          <p:nvPr/>
-        </p:nvSpPr>
-        <p:spPr>
-          <a:xfrm>
-            <a:off x="6080760" y="2130552"/>
+          <p:cNvPr id="38" name="TextBox 37"/>
+          <p:cNvSpPr txBox="1"/>
+          <p:nvPr/>
+        </p:nvSpPr>
+        <p:spPr>
+          <a:xfrm>
+            <a:off x="6080760" y="2514600"/>
             <a:ext cx="502920" cy="201168"/>
           </a:xfrm>
           <a:prstGeom prst="rect">
@@ -5257,20 +5411,20 @@
                 </a:solidFill>
                 <a:latin typeface="Microsoft YaHei"/>
               </a:rPr>
-              <a:t>-2.82%</a:t>
-            </a:r>
-          </a:p>
-        </p:txBody>
-      </p:sp>
-      <p:sp>
-        <p:nvSpPr>
-          <p:cNvPr id="35" name="TextBox 34"/>
-          <p:cNvSpPr txBox="1"/>
-          <p:nvPr/>
-        </p:nvSpPr>
-        <p:spPr>
-          <a:xfrm>
-            <a:off x="4251960" y="2505456"/>
+              <a:t>-3.34%</a:t>
+            </a:r>
+          </a:p>
+        </p:txBody>
+      </p:sp>
+      <p:sp>
+        <p:nvSpPr>
+          <p:cNvPr id="39" name="TextBox 38"/>
+          <p:cNvSpPr txBox="1"/>
+          <p:nvPr/>
+        </p:nvSpPr>
+        <p:spPr>
+          <a:xfrm>
+            <a:off x="4251960" y="2889503"/>
             <a:ext cx="1078992" cy="201168"/>
           </a:xfrm>
           <a:prstGeom prst="rect">
@@ -5291,20 +5445,20 @@
                 </a:solidFill>
                 <a:latin typeface="Microsoft YaHei"/>
               </a:rPr>
-              <a:t>纳斯达克100指</a:t>
-            </a:r>
-          </a:p>
-        </p:txBody>
-      </p:sp>
-      <p:sp>
-        <p:nvSpPr>
-          <p:cNvPr id="36" name="Rectangle 35"/>
+              <a:t>兴全安泰积极养老</a:t>
+            </a:r>
+          </a:p>
+        </p:txBody>
+      </p:sp>
+      <p:sp>
+        <p:nvSpPr>
+          <p:cNvPr id="40" name="Rectangle 39"/>
           <p:cNvSpPr/>
           <p:nvPr/>
         </p:nvSpPr>
         <p:spPr>
           <a:xfrm>
-            <a:off x="6035040" y="2578608"/>
+            <a:off x="6035040" y="2962656"/>
             <a:ext cx="9144" cy="118872"/>
           </a:xfrm>
           <a:prstGeom prst="rect">
@@ -5341,14 +5495,14 @@
       </p:sp>
       <p:sp>
         <p:nvSpPr>
-          <p:cNvPr id="37" name="Rectangle 36"/>
+          <p:cNvPr id="41" name="Rectangle 40"/>
           <p:cNvSpPr/>
           <p:nvPr/>
         </p:nvSpPr>
         <p:spPr>
           <a:xfrm>
-            <a:off x="4709160" y="2560320"/>
-            <a:ext cx="1325880" cy="146304"/>
+            <a:off x="5440465" y="2944368"/>
+            <a:ext cx="594574" cy="146304"/>
           </a:xfrm>
           <a:prstGeom prst="rect">
             <a:avLst/>
@@ -5384,13 +5538,13 @@
       </p:sp>
       <p:sp>
         <p:nvSpPr>
-          <p:cNvPr id="38" name="TextBox 37"/>
-          <p:cNvSpPr txBox="1"/>
-          <p:nvPr/>
-        </p:nvSpPr>
-        <p:spPr>
-          <a:xfrm>
-            <a:off x="6080760" y="2514600"/>
+          <p:cNvPr id="42" name="TextBox 41"/>
+          <p:cNvSpPr txBox="1"/>
+          <p:nvPr/>
+        </p:nvSpPr>
+        <p:spPr>
+          <a:xfrm>
+            <a:off x="6080760" y="2898648"/>
             <a:ext cx="502920" cy="201168"/>
           </a:xfrm>
           <a:prstGeom prst="rect">
@@ -5411,20 +5565,20 @@
                 </a:solidFill>
                 <a:latin typeface="Microsoft YaHei"/>
               </a:rPr>
-              <a:t>-3.34%</a:t>
-            </a:r>
-          </a:p>
-        </p:txBody>
-      </p:sp>
-      <p:sp>
-        <p:nvSpPr>
-          <p:cNvPr id="39" name="TextBox 38"/>
-          <p:cNvSpPr txBox="1"/>
-          <p:nvPr/>
-        </p:nvSpPr>
-        <p:spPr>
-          <a:xfrm>
-            <a:off x="4251960" y="2889503"/>
+              <a:t>-1.50%</a:t>
+            </a:r>
+          </a:p>
+        </p:txBody>
+      </p:sp>
+      <p:sp>
+        <p:nvSpPr>
+          <p:cNvPr id="43" name="TextBox 42"/>
+          <p:cNvSpPr txBox="1"/>
+          <p:nvPr/>
+        </p:nvSpPr>
+        <p:spPr>
+          <a:xfrm>
+            <a:off x="4251960" y="3273551"/>
             <a:ext cx="1078992" cy="201168"/>
           </a:xfrm>
           <a:prstGeom prst="rect">
@@ -5445,20 +5599,20 @@
                 </a:solidFill>
                 <a:latin typeface="Microsoft YaHei"/>
               </a:rPr>
-              <a:t>兴全安泰积极养老</a:t>
-            </a:r>
-          </a:p>
-        </p:txBody>
-      </p:sp>
-      <p:sp>
-        <p:nvSpPr>
-          <p:cNvPr id="40" name="Rectangle 39"/>
+              <a:t>易方达全球优质企</a:t>
+            </a:r>
+          </a:p>
+        </p:txBody>
+      </p:sp>
+      <p:sp>
+        <p:nvSpPr>
+          <p:cNvPr id="44" name="Rectangle 43"/>
           <p:cNvSpPr/>
           <p:nvPr/>
         </p:nvSpPr>
         <p:spPr>
           <a:xfrm>
-            <a:off x="6035040" y="2962656"/>
+            <a:off x="6035040" y="3346703"/>
             <a:ext cx="9144" cy="118872"/>
           </a:xfrm>
           <a:prstGeom prst="rect">
@@ -5495,14 +5649,14 @@
       </p:sp>
       <p:sp>
         <p:nvSpPr>
-          <p:cNvPr id="41" name="Rectangle 40"/>
+          <p:cNvPr id="45" name="Rectangle 44"/>
           <p:cNvSpPr/>
           <p:nvPr/>
         </p:nvSpPr>
         <p:spPr>
           <a:xfrm>
-            <a:off x="5440465" y="2944368"/>
-            <a:ext cx="594574" cy="146304"/>
+            <a:off x="5183440" y="3328415"/>
+            <a:ext cx="851599" cy="146304"/>
           </a:xfrm>
           <a:prstGeom prst="rect">
             <a:avLst/>
@@ -5538,13 +5692,13 @@
       </p:sp>
       <p:sp>
         <p:nvSpPr>
-          <p:cNvPr id="42" name="TextBox 41"/>
-          <p:cNvSpPr txBox="1"/>
-          <p:nvPr/>
-        </p:nvSpPr>
-        <p:spPr>
-          <a:xfrm>
-            <a:off x="6080760" y="2898648"/>
+          <p:cNvPr id="46" name="TextBox 45"/>
+          <p:cNvSpPr txBox="1"/>
+          <p:nvPr/>
+        </p:nvSpPr>
+        <p:spPr>
+          <a:xfrm>
+            <a:off x="6080760" y="3282696"/>
             <a:ext cx="502920" cy="201168"/>
           </a:xfrm>
           <a:prstGeom prst="rect">
@@ -5565,20 +5719,54 @@
                 </a:solidFill>
                 <a:latin typeface="Microsoft YaHei"/>
               </a:rPr>
-              <a:t>-1.50%</a:t>
-            </a:r>
-          </a:p>
-        </p:txBody>
-      </p:sp>
-      <p:sp>
-        <p:nvSpPr>
-          <p:cNvPr id="43" name="TextBox 42"/>
-          <p:cNvSpPr txBox="1"/>
-          <p:nvPr/>
-        </p:nvSpPr>
-        <p:spPr>
-          <a:xfrm>
-            <a:off x="4251960" y="3273551"/>
+              <a:t>-2.15%</a:t>
+            </a:r>
+          </a:p>
+        </p:txBody>
+      </p:sp>
+      <p:sp>
+        <p:nvSpPr>
+          <p:cNvPr id="47" name="TextBox 46"/>
+          <p:cNvSpPr txBox="1"/>
+          <p:nvPr/>
+        </p:nvSpPr>
+        <p:spPr>
+          <a:xfrm>
+            <a:off x="7863840" y="1371600"/>
+            <a:ext cx="3383280" cy="219456"/>
+          </a:xfrm>
+          <a:prstGeom prst="rect">
+            <a:avLst/>
+          </a:prstGeom>
+          <a:noFill/>
+        </p:spPr>
+        <p:txBody>
+          <a:bodyPr wrap="none" lIns="18288" rIns="18288" tIns="18288" bIns="18288">
+            <a:spAutoFit/>
+          </a:bodyPr>
+          <a:lstStyle/>
+          <a:p>
+            <a:r>
+              <a:rPr sz="1100" b="1">
+                <a:solidFill>
+                  <a:srgbClr val="1A2026"/>
+                </a:solidFill>
+                <a:latin typeface="Microsoft YaHei"/>
+              </a:rPr>
+              <a:t>近1个月收益</a:t>
+            </a:r>
+          </a:p>
+        </p:txBody>
+      </p:sp>
+      <p:sp>
+        <p:nvSpPr>
+          <p:cNvPr id="48" name="TextBox 47"/>
+          <p:cNvSpPr txBox="1"/>
+          <p:nvPr/>
+        </p:nvSpPr>
+        <p:spPr>
+          <a:xfrm>
+            <a:off x="7863840" y="1737360"/>
             <a:ext cx="1078992" cy="201168"/>
           </a:xfrm>
           <a:prstGeom prst="rect">
@@ -5599,20 +5787,20 @@
                 </a:solidFill>
                 <a:latin typeface="Microsoft YaHei"/>
               </a:rPr>
-              <a:t>易方达全球优质企</a:t>
-            </a:r>
-          </a:p>
-        </p:txBody>
-      </p:sp>
-      <p:sp>
-        <p:nvSpPr>
-          <p:cNvPr id="44" name="Rectangle 43"/>
+              <a:t>华夏沪深300E</a:t>
+            </a:r>
+          </a:p>
+        </p:txBody>
+      </p:sp>
+      <p:sp>
+        <p:nvSpPr>
+          <p:cNvPr id="49" name="Rectangle 48"/>
           <p:cNvSpPr/>
           <p:nvPr/>
         </p:nvSpPr>
         <p:spPr>
           <a:xfrm>
-            <a:off x="6035040" y="3346703"/>
+            <a:off x="9646919" y="1810512"/>
             <a:ext cx="9144" cy="118872"/>
           </a:xfrm>
           <a:prstGeom prst="rect">
@@ -5649,14 +5837,14 @@
       </p:sp>
       <p:sp>
         <p:nvSpPr>
-          <p:cNvPr id="45" name="Rectangle 44"/>
+          <p:cNvPr id="50" name="Rectangle 49"/>
           <p:cNvSpPr/>
           <p:nvPr/>
         </p:nvSpPr>
         <p:spPr>
           <a:xfrm>
-            <a:off x="5183440" y="3328415"/>
-            <a:ext cx="851599" cy="146304"/>
+            <a:off x="8406834" y="1792224"/>
+            <a:ext cx="1240085" cy="146304"/>
           </a:xfrm>
           <a:prstGeom prst="rect">
             <a:avLst/>
@@ -5692,13 +5880,13 @@
       </p:sp>
       <p:sp>
         <p:nvSpPr>
-          <p:cNvPr id="46" name="TextBox 45"/>
-          <p:cNvSpPr txBox="1"/>
-          <p:nvPr/>
-        </p:nvSpPr>
-        <p:spPr>
-          <a:xfrm>
-            <a:off x="6080760" y="3282696"/>
+          <p:cNvPr id="51" name="TextBox 50"/>
+          <p:cNvSpPr txBox="1"/>
+          <p:nvPr/>
+        </p:nvSpPr>
+        <p:spPr>
+          <a:xfrm>
+            <a:off x="9692640" y="1746504"/>
             <a:ext cx="502920" cy="201168"/>
           </a:xfrm>
           <a:prstGeom prst="rect">
@@ -5719,54 +5907,20 @@
                 </a:solidFill>
                 <a:latin typeface="Microsoft YaHei"/>
               </a:rPr>
-              <a:t>-2.15%</a:t>
-            </a:r>
-          </a:p>
-        </p:txBody>
-      </p:sp>
-      <p:sp>
-        <p:nvSpPr>
-          <p:cNvPr id="47" name="TextBox 46"/>
-          <p:cNvSpPr txBox="1"/>
-          <p:nvPr/>
-        </p:nvSpPr>
-        <p:spPr>
-          <a:xfrm>
-            <a:off x="7863840" y="1371600"/>
-            <a:ext cx="3383280" cy="219456"/>
-          </a:xfrm>
-          <a:prstGeom prst="rect">
-            <a:avLst/>
-          </a:prstGeom>
-          <a:noFill/>
-        </p:spPr>
-        <p:txBody>
-          <a:bodyPr wrap="none" lIns="18288" rIns="18288" tIns="18288" bIns="18288">
-            <a:spAutoFit/>
-          </a:bodyPr>
-          <a:lstStyle/>
-          <a:p>
-            <a:r>
-              <a:rPr sz="1100" b="1">
-                <a:solidFill>
-                  <a:srgbClr val="1A2026"/>
-                </a:solidFill>
-                <a:latin typeface="Microsoft YaHei"/>
-              </a:rPr>
-              <a:t>近1个月收益</a:t>
-            </a:r>
-          </a:p>
-        </p:txBody>
-      </p:sp>
-      <p:sp>
-        <p:nvSpPr>
-          <p:cNvPr id="48" name="TextBox 47"/>
-          <p:cNvSpPr txBox="1"/>
-          <p:nvPr/>
-        </p:nvSpPr>
-        <p:spPr>
-          <a:xfrm>
-            <a:off x="7863840" y="1737360"/>
+              <a:t>-7.73%</a:t>
+            </a:r>
+          </a:p>
+        </p:txBody>
+      </p:sp>
+      <p:sp>
+        <p:nvSpPr>
+          <p:cNvPr id="52" name="TextBox 51"/>
+          <p:cNvSpPr txBox="1"/>
+          <p:nvPr/>
+        </p:nvSpPr>
+        <p:spPr>
+          <a:xfrm>
+            <a:off x="7863840" y="2121408"/>
             <a:ext cx="1078992" cy="201168"/>
           </a:xfrm>
           <a:prstGeom prst="rect">
@@ -5787,20 +5941,20 @@
                 </a:solidFill>
                 <a:latin typeface="Microsoft YaHei"/>
               </a:rPr>
-              <a:t>华夏沪深300E</a:t>
-            </a:r>
-          </a:p>
-        </p:txBody>
-      </p:sp>
-      <p:sp>
-        <p:nvSpPr>
-          <p:cNvPr id="49" name="Rectangle 48"/>
+              <a:t>富国红利精选QD</a:t>
+            </a:r>
+          </a:p>
+        </p:txBody>
+      </p:sp>
+      <p:sp>
+        <p:nvSpPr>
+          <p:cNvPr id="53" name="Rectangle 52"/>
           <p:cNvSpPr/>
           <p:nvPr/>
         </p:nvSpPr>
         <p:spPr>
           <a:xfrm>
-            <a:off x="9646919" y="1810512"/>
+            <a:off x="9646919" y="2194560"/>
             <a:ext cx="9144" cy="118872"/>
           </a:xfrm>
           <a:prstGeom prst="rect">
@@ -5837,14 +5991,14 @@
       </p:sp>
       <p:sp>
         <p:nvSpPr>
-          <p:cNvPr id="50" name="Rectangle 49"/>
+          <p:cNvPr id="54" name="Rectangle 53"/>
           <p:cNvSpPr/>
           <p:nvPr/>
         </p:nvSpPr>
         <p:spPr>
           <a:xfrm>
-            <a:off x="8321040" y="1792224"/>
-            <a:ext cx="1325880" cy="146304"/>
+            <a:off x="8664435" y="2176272"/>
+            <a:ext cx="982484" cy="146304"/>
           </a:xfrm>
           <a:prstGeom prst="rect">
             <a:avLst/>
@@ -5880,13 +6034,13 @@
       </p:sp>
       <p:sp>
         <p:nvSpPr>
-          <p:cNvPr id="51" name="TextBox 50"/>
-          <p:cNvSpPr txBox="1"/>
-          <p:nvPr/>
-        </p:nvSpPr>
-        <p:spPr>
-          <a:xfrm>
-            <a:off x="9692640" y="1746504"/>
+          <p:cNvPr id="55" name="TextBox 54"/>
+          <p:cNvSpPr txBox="1"/>
+          <p:nvPr/>
+        </p:nvSpPr>
+        <p:spPr>
+          <a:xfrm>
+            <a:off x="9692640" y="2130552"/>
             <a:ext cx="502920" cy="201168"/>
           </a:xfrm>
           <a:prstGeom prst="rect">
@@ -5907,20 +6061,20 @@
                 </a:solidFill>
                 <a:latin typeface="Microsoft YaHei"/>
               </a:rPr>
-              <a:t>-8.65%</a:t>
-            </a:r>
-          </a:p>
-        </p:txBody>
-      </p:sp>
-      <p:sp>
-        <p:nvSpPr>
-          <p:cNvPr id="52" name="TextBox 51"/>
-          <p:cNvSpPr txBox="1"/>
-          <p:nvPr/>
-        </p:nvSpPr>
-        <p:spPr>
-          <a:xfrm>
-            <a:off x="7863840" y="2121408"/>
+              <a:t>-6.13%</a:t>
+            </a:r>
+          </a:p>
+        </p:txBody>
+      </p:sp>
+      <p:sp>
+        <p:nvSpPr>
+          <p:cNvPr id="56" name="TextBox 55"/>
+          <p:cNvSpPr txBox="1"/>
+          <p:nvPr/>
+        </p:nvSpPr>
+        <p:spPr>
+          <a:xfrm>
+            <a:off x="7863840" y="2505456"/>
             <a:ext cx="1078992" cy="201168"/>
           </a:xfrm>
           <a:prstGeom prst="rect">
@@ -5941,20 +6095,20 @@
                 </a:solidFill>
                 <a:latin typeface="Microsoft YaHei"/>
               </a:rPr>
-              <a:t>富国红利精选QD</a:t>
-            </a:r>
-          </a:p>
-        </p:txBody>
-      </p:sp>
-      <p:sp>
-        <p:nvSpPr>
-          <p:cNvPr id="53" name="Rectangle 52"/>
+              <a:t>纳斯达克100指</a:t>
+            </a:r>
+          </a:p>
+        </p:txBody>
+      </p:sp>
+      <p:sp>
+        <p:nvSpPr>
+          <p:cNvPr id="57" name="Rectangle 56"/>
           <p:cNvSpPr/>
           <p:nvPr/>
         </p:nvSpPr>
         <p:spPr>
           <a:xfrm>
-            <a:off x="9646919" y="2194560"/>
+            <a:off x="9646919" y="2578608"/>
             <a:ext cx="9144" cy="118872"/>
           </a:xfrm>
           <a:prstGeom prst="rect">
@@ -5991,14 +6145,14 @@
       </p:sp>
       <p:sp>
         <p:nvSpPr>
-          <p:cNvPr id="54" name="Rectangle 53"/>
+          <p:cNvPr id="58" name="Rectangle 57"/>
           <p:cNvSpPr/>
           <p:nvPr/>
         </p:nvSpPr>
         <p:spPr>
           <a:xfrm>
-            <a:off x="8707504" y="2176272"/>
-            <a:ext cx="939415" cy="146304"/>
+            <a:off x="9584828" y="2560320"/>
+            <a:ext cx="62091" cy="146304"/>
           </a:xfrm>
           <a:prstGeom prst="rect">
             <a:avLst/>
@@ -6034,13 +6188,13 @@
       </p:sp>
       <p:sp>
         <p:nvSpPr>
-          <p:cNvPr id="55" name="TextBox 54"/>
-          <p:cNvSpPr txBox="1"/>
-          <p:nvPr/>
-        </p:nvSpPr>
-        <p:spPr>
-          <a:xfrm>
-            <a:off x="9692640" y="2130552"/>
+          <p:cNvPr id="59" name="TextBox 58"/>
+          <p:cNvSpPr txBox="1"/>
+          <p:nvPr/>
+        </p:nvSpPr>
+        <p:spPr>
+          <a:xfrm>
+            <a:off x="9692640" y="2514600"/>
             <a:ext cx="502920" cy="201168"/>
           </a:xfrm>
           <a:prstGeom prst="rect">
@@ -6061,20 +6215,20 @@
                 </a:solidFill>
                 <a:latin typeface="Microsoft YaHei"/>
               </a:rPr>
-              <a:t>-6.13%</a:t>
-            </a:r>
-          </a:p>
-        </p:txBody>
-      </p:sp>
-      <p:sp>
-        <p:nvSpPr>
-          <p:cNvPr id="56" name="TextBox 55"/>
-          <p:cNvSpPr txBox="1"/>
-          <p:nvPr/>
-        </p:nvSpPr>
-        <p:spPr>
-          <a:xfrm>
-            <a:off x="7863840" y="2505456"/>
+              <a:t>-0.39%</a:t>
+            </a:r>
+          </a:p>
+        </p:txBody>
+      </p:sp>
+      <p:sp>
+        <p:nvSpPr>
+          <p:cNvPr id="60" name="TextBox 59"/>
+          <p:cNvSpPr txBox="1"/>
+          <p:nvPr/>
+        </p:nvSpPr>
+        <p:spPr>
+          <a:xfrm>
+            <a:off x="7863840" y="2889503"/>
             <a:ext cx="1078992" cy="201168"/>
           </a:xfrm>
           <a:prstGeom prst="rect">
@@ -6095,20 +6249,20 @@
                 </a:solidFill>
                 <a:latin typeface="Microsoft YaHei"/>
               </a:rPr>
-              <a:t>纳斯达克100指</a:t>
-            </a:r>
-          </a:p>
-        </p:txBody>
-      </p:sp>
-      <p:sp>
-        <p:nvSpPr>
-          <p:cNvPr id="57" name="Rectangle 56"/>
+              <a:t>兴全安泰积极养老</a:t>
+            </a:r>
+          </a:p>
+        </p:txBody>
+      </p:sp>
+      <p:sp>
+        <p:nvSpPr>
+          <p:cNvPr id="61" name="Rectangle 60"/>
           <p:cNvSpPr/>
           <p:nvPr/>
         </p:nvSpPr>
         <p:spPr>
           <a:xfrm>
-            <a:off x="9646919" y="2578608"/>
+            <a:off x="9646919" y="2962656"/>
             <a:ext cx="9144" cy="118872"/>
           </a:xfrm>
           <a:prstGeom prst="rect">
@@ -6145,14 +6299,14 @@
       </p:sp>
       <p:sp>
         <p:nvSpPr>
-          <p:cNvPr id="58" name="Rectangle 57"/>
+          <p:cNvPr id="62" name="Rectangle 61"/>
           <p:cNvSpPr/>
           <p:nvPr/>
         </p:nvSpPr>
         <p:spPr>
           <a:xfrm>
-            <a:off x="9587550" y="2560320"/>
-            <a:ext cx="59369" cy="146304"/>
+            <a:off x="8752764" y="2944368"/>
+            <a:ext cx="894155" cy="146304"/>
           </a:xfrm>
           <a:prstGeom prst="rect">
             <a:avLst/>
@@ -6188,13 +6342,13 @@
       </p:sp>
       <p:sp>
         <p:nvSpPr>
-          <p:cNvPr id="59" name="TextBox 58"/>
-          <p:cNvSpPr txBox="1"/>
-          <p:nvPr/>
-        </p:nvSpPr>
-        <p:spPr>
-          <a:xfrm>
-            <a:off x="9692640" y="2514600"/>
+          <p:cNvPr id="63" name="TextBox 62"/>
+          <p:cNvSpPr txBox="1"/>
+          <p:nvPr/>
+        </p:nvSpPr>
+        <p:spPr>
+          <a:xfrm>
+            <a:off x="9692640" y="2898648"/>
             <a:ext cx="502920" cy="201168"/>
           </a:xfrm>
           <a:prstGeom prst="rect">
@@ -6215,20 +6369,20 @@
                 </a:solidFill>
                 <a:latin typeface="Microsoft YaHei"/>
               </a:rPr>
-              <a:t>-0.39%</a:t>
-            </a:r>
-          </a:p>
-        </p:txBody>
-      </p:sp>
-      <p:sp>
-        <p:nvSpPr>
-          <p:cNvPr id="60" name="TextBox 59"/>
-          <p:cNvSpPr txBox="1"/>
-          <p:nvPr/>
-        </p:nvSpPr>
-        <p:spPr>
-          <a:xfrm>
-            <a:off x="7863840" y="2889503"/>
+              <a:t>-5.57%</a:t>
+            </a:r>
+          </a:p>
+        </p:txBody>
+      </p:sp>
+      <p:sp>
+        <p:nvSpPr>
+          <p:cNvPr id="64" name="TextBox 63"/>
+          <p:cNvSpPr txBox="1"/>
+          <p:nvPr/>
+        </p:nvSpPr>
+        <p:spPr>
+          <a:xfrm>
+            <a:off x="7863840" y="3273551"/>
             <a:ext cx="1078992" cy="201168"/>
           </a:xfrm>
           <a:prstGeom prst="rect">
@@ -6249,20 +6403,20 @@
                 </a:solidFill>
                 <a:latin typeface="Microsoft YaHei"/>
               </a:rPr>
-              <a:t>兴全安泰积极养老</a:t>
-            </a:r>
-          </a:p>
-        </p:txBody>
-      </p:sp>
-      <p:sp>
-        <p:nvSpPr>
-          <p:cNvPr id="61" name="Rectangle 60"/>
+              <a:t>易方达全球优质企</a:t>
+            </a:r>
+          </a:p>
+        </p:txBody>
+      </p:sp>
+      <p:sp>
+        <p:nvSpPr>
+          <p:cNvPr id="65" name="Rectangle 64"/>
           <p:cNvSpPr/>
           <p:nvPr/>
         </p:nvSpPr>
         <p:spPr>
           <a:xfrm>
-            <a:off x="9646919" y="2962656"/>
+            <a:off x="9646919" y="3346703"/>
             <a:ext cx="9144" cy="118872"/>
           </a:xfrm>
           <a:prstGeom prst="rect">
@@ -6299,14 +6453,14 @@
       </p:sp>
       <p:sp>
         <p:nvSpPr>
-          <p:cNvPr id="62" name="Rectangle 61"/>
+          <p:cNvPr id="66" name="Rectangle 65"/>
           <p:cNvSpPr/>
           <p:nvPr/>
         </p:nvSpPr>
         <p:spPr>
           <a:xfrm>
-            <a:off x="8791961" y="2944368"/>
-            <a:ext cx="854958" cy="146304"/>
+            <a:off x="8321040" y="3328415"/>
+            <a:ext cx="1325880" cy="146304"/>
           </a:xfrm>
           <a:prstGeom prst="rect">
             <a:avLst/>
@@ -6342,160 +6496,6 @@
       </p:sp>
       <p:sp>
         <p:nvSpPr>
-          <p:cNvPr id="63" name="TextBox 62"/>
-          <p:cNvSpPr txBox="1"/>
-          <p:nvPr/>
-        </p:nvSpPr>
-        <p:spPr>
-          <a:xfrm>
-            <a:off x="9692640" y="2898648"/>
-            <a:ext cx="502920" cy="201168"/>
-          </a:xfrm>
-          <a:prstGeom prst="rect">
-            <a:avLst/>
-          </a:prstGeom>
-          <a:noFill/>
-        </p:spPr>
-        <p:txBody>
-          <a:bodyPr wrap="none" lIns="18288" rIns="18288" tIns="18288" bIns="18288">
-            <a:spAutoFit/>
-          </a:bodyPr>
-          <a:lstStyle/>
-          <a:p>
-            <a:r>
-              <a:rPr sz="800" b="0">
-                <a:solidFill>
-                  <a:srgbClr val="1A2026"/>
-                </a:solidFill>
-                <a:latin typeface="Microsoft YaHei"/>
-              </a:rPr>
-              <a:t>-5.57%</a:t>
-            </a:r>
-          </a:p>
-        </p:txBody>
-      </p:sp>
-      <p:sp>
-        <p:nvSpPr>
-          <p:cNvPr id="64" name="TextBox 63"/>
-          <p:cNvSpPr txBox="1"/>
-          <p:nvPr/>
-        </p:nvSpPr>
-        <p:spPr>
-          <a:xfrm>
-            <a:off x="7863840" y="3273551"/>
-            <a:ext cx="1078992" cy="201168"/>
-          </a:xfrm>
-          <a:prstGeom prst="rect">
-            <a:avLst/>
-          </a:prstGeom>
-          <a:noFill/>
-        </p:spPr>
-        <p:txBody>
-          <a:bodyPr wrap="none" lIns="18288" rIns="18288" tIns="18288" bIns="18288">
-            <a:spAutoFit/>
-          </a:bodyPr>
-          <a:lstStyle/>
-          <a:p>
-            <a:r>
-              <a:rPr sz="800" b="0">
-                <a:solidFill>
-                  <a:srgbClr val="65707D"/>
-                </a:solidFill>
-                <a:latin typeface="Microsoft YaHei"/>
-              </a:rPr>
-              <a:t>易方达全球优质企</a:t>
-            </a:r>
-          </a:p>
-        </p:txBody>
-      </p:sp>
-      <p:sp>
-        <p:nvSpPr>
-          <p:cNvPr id="65" name="Rectangle 64"/>
-          <p:cNvSpPr/>
-          <p:nvPr/>
-        </p:nvSpPr>
-        <p:spPr>
-          <a:xfrm>
-            <a:off x="9646919" y="3346703"/>
-            <a:ext cx="9144" cy="118872"/>
-          </a:xfrm>
-          <a:prstGeom prst="rect">
-            <a:avLst/>
-          </a:prstGeom>
-          <a:solidFill>
-            <a:srgbClr val="DAD5C9"/>
-          </a:solidFill>
-          <a:ln>
-            <a:noFill/>
-          </a:ln>
-        </p:spPr>
-        <p:style>
-          <a:lnRef idx="1">
-            <a:schemeClr val="accent1"/>
-          </a:lnRef>
-          <a:fillRef idx="3">
-            <a:schemeClr val="accent1"/>
-          </a:fillRef>
-          <a:effectRef idx="2">
-            <a:schemeClr val="accent1"/>
-          </a:effectRef>
-          <a:fontRef idx="minor">
-            <a:schemeClr val="lt1"/>
-          </a:fontRef>
-        </p:style>
-        <p:txBody>
-          <a:bodyPr rtlCol="0" anchor="ctr"/>
-          <a:lstStyle/>
-          <a:p>
-            <a:pPr algn="ctr"/>
-          </a:p>
-        </p:txBody>
-      </p:sp>
-      <p:sp>
-        <p:nvSpPr>
-          <p:cNvPr id="66" name="Rectangle 65"/>
-          <p:cNvSpPr/>
-          <p:nvPr/>
-        </p:nvSpPr>
-        <p:spPr>
-          <a:xfrm>
-            <a:off x="8379163" y="3328415"/>
-            <a:ext cx="1267756" cy="146304"/>
-          </a:xfrm>
-          <a:prstGeom prst="rect">
-            <a:avLst/>
-          </a:prstGeom>
-          <a:solidFill>
-            <a:srgbClr val="BF4040"/>
-          </a:solidFill>
-          <a:ln>
-            <a:noFill/>
-          </a:ln>
-        </p:spPr>
-        <p:style>
-          <a:lnRef idx="1">
-            <a:schemeClr val="accent1"/>
-          </a:lnRef>
-          <a:fillRef idx="3">
-            <a:schemeClr val="accent1"/>
-          </a:fillRef>
-          <a:effectRef idx="2">
-            <a:schemeClr val="accent1"/>
-          </a:effectRef>
-          <a:fontRef idx="minor">
-            <a:schemeClr val="lt1"/>
-          </a:fontRef>
-        </p:style>
-        <p:txBody>
-          <a:bodyPr rtlCol="0" anchor="ctr"/>
-          <a:lstStyle/>
-          <a:p>
-            <a:pPr algn="ctr"/>
-          </a:p>
-        </p:txBody>
-      </p:sp>
-      <p:sp>
-        <p:nvSpPr>
           <p:cNvPr id="67" name="TextBox 66"/>
           <p:cNvSpPr txBox="1"/>
           <p:nvPr/>
@@ -6761,7 +6761,7 @@
                 </a:solidFill>
                 <a:latin typeface="Microsoft YaHei"/>
               </a:rPr>
-              <a:t>1.5576</a:t>
+              <a:t>1.5837</a:t>
             </a:r>
           </a:p>
         </p:txBody>
@@ -6795,7 +6795,7 @@
                 </a:solidFill>
                 <a:latin typeface="Microsoft YaHei"/>
               </a:rPr>
-              <a:t>2026-10-22</a:t>
+              <a:t>2026-10-23</a:t>
             </a:r>
           </a:p>
         </p:txBody>
@@ -7737,7 +7737,7 @@
         <p:spPr>
           <a:xfrm>
             <a:off x="8549640" y="1737360"/>
-            <a:ext cx="1361526" cy="201168"/>
+            <a:ext cx="1377342" cy="201168"/>
           </a:xfrm>
           <a:prstGeom prst="rect">
             <a:avLst/>
@@ -7800,7 +7800,7 @@
                 </a:solidFill>
                 <a:latin typeface="Microsoft YaHei"/>
               </a:rPr>
-              <a:t>19.68%</a:t>
+              <a:t>19.91%</a:t>
             </a:r>
           </a:p>
         </p:txBody>
@@ -9108,7 +9108,7 @@
                 </a:solidFill>
                 <a:latin typeface="Microsoft YaHei"/>
               </a:rPr>
-              <a:t>2026-10-22</a:t>
+              <a:t>2026-10-23</a:t>
             </a:r>
           </a:p>
         </p:txBody>
